--- a/AgenticAI/1-Intro-To-AgenticAI/1_Definition_Of_Agentic_AI_and_application_in_FinTech.pptx
+++ b/AgenticAI/1-Intro-To-AgenticAI/1_Definition_Of_Agentic_AI_and_application_in_FinTech.pptx
@@ -5,39 +5,38 @@
     <p:sldMasterId id="2147483648" r:id="rId1"/>
   </p:sldMasterIdLst>
   <p:notesMasterIdLst>
-    <p:notesMasterId r:id="rId29"/>
+    <p:notesMasterId r:id="rId28"/>
   </p:notesMasterIdLst>
   <p:handoutMasterIdLst>
-    <p:handoutMasterId r:id="rId30"/>
+    <p:handoutMasterId r:id="rId29"/>
   </p:handoutMasterIdLst>
   <p:sldIdLst>
     <p:sldId id="257" r:id="rId2"/>
     <p:sldId id="276" r:id="rId3"/>
     <p:sldId id="277" r:id="rId4"/>
     <p:sldId id="278" r:id="rId5"/>
-    <p:sldId id="279" r:id="rId6"/>
-    <p:sldId id="295" r:id="rId7"/>
-    <p:sldId id="289" r:id="rId8"/>
-    <p:sldId id="290" r:id="rId9"/>
-    <p:sldId id="291" r:id="rId10"/>
-    <p:sldId id="292" r:id="rId11"/>
-    <p:sldId id="293" r:id="rId12"/>
-    <p:sldId id="294" r:id="rId13"/>
-    <p:sldId id="296" r:id="rId14"/>
-    <p:sldId id="297" r:id="rId15"/>
-    <p:sldId id="298" r:id="rId16"/>
-    <p:sldId id="299" r:id="rId17"/>
-    <p:sldId id="280" r:id="rId18"/>
-    <p:sldId id="300" r:id="rId19"/>
-    <p:sldId id="281" r:id="rId20"/>
-    <p:sldId id="301" r:id="rId21"/>
-    <p:sldId id="282" r:id="rId22"/>
-    <p:sldId id="283" r:id="rId23"/>
-    <p:sldId id="284" r:id="rId24"/>
-    <p:sldId id="285" r:id="rId25"/>
-    <p:sldId id="286" r:id="rId26"/>
-    <p:sldId id="302" r:id="rId27"/>
-    <p:sldId id="275" r:id="rId28"/>
+    <p:sldId id="295" r:id="rId6"/>
+    <p:sldId id="289" r:id="rId7"/>
+    <p:sldId id="290" r:id="rId8"/>
+    <p:sldId id="291" r:id="rId9"/>
+    <p:sldId id="292" r:id="rId10"/>
+    <p:sldId id="293" r:id="rId11"/>
+    <p:sldId id="294" r:id="rId12"/>
+    <p:sldId id="296" r:id="rId13"/>
+    <p:sldId id="297" r:id="rId14"/>
+    <p:sldId id="298" r:id="rId15"/>
+    <p:sldId id="299" r:id="rId16"/>
+    <p:sldId id="280" r:id="rId17"/>
+    <p:sldId id="300" r:id="rId18"/>
+    <p:sldId id="281" r:id="rId19"/>
+    <p:sldId id="301" r:id="rId20"/>
+    <p:sldId id="282" r:id="rId21"/>
+    <p:sldId id="283" r:id="rId22"/>
+    <p:sldId id="284" r:id="rId23"/>
+    <p:sldId id="285" r:id="rId24"/>
+    <p:sldId id="286" r:id="rId25"/>
+    <p:sldId id="302" r:id="rId26"/>
+    <p:sldId id="275" r:id="rId27"/>
   </p:sldIdLst>
   <p:sldSz cx="12192000" cy="6858000"/>
   <p:notesSz cx="6858000" cy="9144000"/>
@@ -241,7 +240,7 @@
           <a:p>
             <a:fld id="{7BAEECA8-D063-486F-AE31-5020270C1449}" type="datetimeFigureOut">
               <a:rPr lang="en-US" smtClean="0"/>
-              <a:t>5/24/2026</a:t>
+              <a:t>5/28/2026</a:t>
             </a:fld>
             <a:endParaRPr lang="en-US"/>
           </a:p>
@@ -418,7 +417,7 @@
           <a:p>
             <a:fld id="{CB233BD1-3BA8-448D-9D08-7846095EA517}" type="datetimeFigureOut">
               <a:rPr lang="en-US" smtClean="0"/>
-              <a:t>5/24/2026</a:t>
+              <a:t>5/28/2026</a:t>
             </a:fld>
             <a:endParaRPr lang="en-US"/>
           </a:p>
@@ -832,7 +831,7 @@
           <a:p>
             <a:fld id="{6383FAE1-13DE-4511-8C1B-C8AFB720664C}" type="datetimeFigureOut">
               <a:rPr lang="en-US" smtClean="0"/>
-              <a:t>5/24/2026</a:t>
+              <a:t>5/28/2026</a:t>
             </a:fld>
             <a:endParaRPr lang="en-US"/>
           </a:p>
@@ -1030,7 +1029,7 @@
           <a:p>
             <a:fld id="{6383FAE1-13DE-4511-8C1B-C8AFB720664C}" type="datetimeFigureOut">
               <a:rPr lang="en-US" smtClean="0"/>
-              <a:t>5/24/2026</a:t>
+              <a:t>5/28/2026</a:t>
             </a:fld>
             <a:endParaRPr lang="en-US"/>
           </a:p>
@@ -1238,7 +1237,7 @@
           <a:p>
             <a:fld id="{6383FAE1-13DE-4511-8C1B-C8AFB720664C}" type="datetimeFigureOut">
               <a:rPr lang="en-US" smtClean="0"/>
-              <a:t>5/24/2026</a:t>
+              <a:t>5/28/2026</a:t>
             </a:fld>
             <a:endParaRPr lang="en-US"/>
           </a:p>
@@ -1436,7 +1435,7 @@
           <a:p>
             <a:fld id="{6383FAE1-13DE-4511-8C1B-C8AFB720664C}" type="datetimeFigureOut">
               <a:rPr lang="en-US" smtClean="0"/>
-              <a:t>5/24/2026</a:t>
+              <a:t>5/28/2026</a:t>
             </a:fld>
             <a:endParaRPr lang="en-US"/>
           </a:p>
@@ -1711,7 +1710,7 @@
           <a:p>
             <a:fld id="{6383FAE1-13DE-4511-8C1B-C8AFB720664C}" type="datetimeFigureOut">
               <a:rPr lang="en-US" smtClean="0"/>
-              <a:t>5/24/2026</a:t>
+              <a:t>5/28/2026</a:t>
             </a:fld>
             <a:endParaRPr lang="en-US"/>
           </a:p>
@@ -1976,7 +1975,7 @@
           <a:p>
             <a:fld id="{6383FAE1-13DE-4511-8C1B-C8AFB720664C}" type="datetimeFigureOut">
               <a:rPr lang="en-US" smtClean="0"/>
-              <a:t>5/24/2026</a:t>
+              <a:t>5/28/2026</a:t>
             </a:fld>
             <a:endParaRPr lang="en-US"/>
           </a:p>
@@ -2388,7 +2387,7 @@
           <a:p>
             <a:fld id="{6383FAE1-13DE-4511-8C1B-C8AFB720664C}" type="datetimeFigureOut">
               <a:rPr lang="en-US" smtClean="0"/>
-              <a:t>5/24/2026</a:t>
+              <a:t>5/28/2026</a:t>
             </a:fld>
             <a:endParaRPr lang="en-US"/>
           </a:p>
@@ -2529,7 +2528,7 @@
           <a:p>
             <a:fld id="{6383FAE1-13DE-4511-8C1B-C8AFB720664C}" type="datetimeFigureOut">
               <a:rPr lang="en-US" smtClean="0"/>
-              <a:t>5/24/2026</a:t>
+              <a:t>5/28/2026</a:t>
             </a:fld>
             <a:endParaRPr lang="en-US"/>
           </a:p>
@@ -2642,7 +2641,7 @@
           <a:p>
             <a:fld id="{6383FAE1-13DE-4511-8C1B-C8AFB720664C}" type="datetimeFigureOut">
               <a:rPr lang="en-US" smtClean="0"/>
-              <a:t>5/24/2026</a:t>
+              <a:t>5/28/2026</a:t>
             </a:fld>
             <a:endParaRPr lang="en-US"/>
           </a:p>
@@ -2953,7 +2952,7 @@
           <a:p>
             <a:fld id="{6383FAE1-13DE-4511-8C1B-C8AFB720664C}" type="datetimeFigureOut">
               <a:rPr lang="en-US" smtClean="0"/>
-              <a:t>5/24/2026</a:t>
+              <a:t>5/28/2026</a:t>
             </a:fld>
             <a:endParaRPr lang="en-US"/>
           </a:p>
@@ -3244,7 +3243,7 @@
           <a:p>
             <a:fld id="{6383FAE1-13DE-4511-8C1B-C8AFB720664C}" type="datetimeFigureOut">
               <a:rPr lang="en-US" smtClean="0"/>
-              <a:t>5/24/2026</a:t>
+              <a:t>5/28/2026</a:t>
             </a:fld>
             <a:endParaRPr lang="en-US"/>
           </a:p>
@@ -3488,7 +3487,7 @@
           <a:p>
             <a:fld id="{6383FAE1-13DE-4511-8C1B-C8AFB720664C}" type="datetimeFigureOut">
               <a:rPr lang="en-US" smtClean="0"/>
-              <a:t>5/24/2026</a:t>
+              <a:t>5/28/2026</a:t>
             </a:fld>
             <a:endParaRPr lang="en-US"/>
           </a:p>
@@ -4061,8 +4060,8 @@
         </p:nvSpPr>
         <p:spPr>
           <a:xfrm>
-            <a:off x="3009900" y="3244334"/>
-            <a:ext cx="6191250" cy="584775"/>
+            <a:off x="3000375" y="2247638"/>
+            <a:ext cx="6191250" cy="707886"/>
           </a:xfrm>
           <a:prstGeom prst="rect">
             <a:avLst/>
@@ -4079,7 +4078,7 @@
               <a:buNone/>
             </a:pPr>
             <a:r>
-              <a:rPr lang="en-US" sz="3200" dirty="0">
+              <a:rPr lang="en-US" sz="4000" dirty="0">
                 <a:solidFill>
                   <a:schemeClr val="accent6">
                     <a:lumMod val="60000"/>
@@ -4106,272 +4105,6 @@
 </file>
 
 <file path=ppt/slides/slide10.xml><?xml version="1.0" encoding="utf-8"?>
-<p:sld xmlns:a="http://schemas.openxmlformats.org/drawingml/2006/main" xmlns:r="http://schemas.openxmlformats.org/officeDocument/2006/relationships" xmlns:p="http://schemas.openxmlformats.org/presentationml/2006/main">
-  <p:cSld>
-    <p:spTree>
-      <p:nvGrpSpPr>
-        <p:cNvPr id="1" name="">
-          <a:extLst>
-            <a:ext uri="{FF2B5EF4-FFF2-40B4-BE49-F238E27FC236}">
-              <a16:creationId xmlns:a16="http://schemas.microsoft.com/office/drawing/2014/main" id="{861E33C1-2944-B406-C85A-9F52C42B7714}"/>
-            </a:ext>
-          </a:extLst>
-        </p:cNvPr>
-        <p:cNvGrpSpPr/>
-        <p:nvPr/>
-      </p:nvGrpSpPr>
-      <p:grpSpPr>
-        <a:xfrm>
-          <a:off x="0" y="0"/>
-          <a:ext cx="0" cy="0"/>
-          <a:chOff x="0" y="0"/>
-          <a:chExt cx="0" cy="0"/>
-        </a:xfrm>
-      </p:grpSpPr>
-      <p:sp>
-        <p:nvSpPr>
-          <p:cNvPr id="9" name="TextBox 8">
-            <a:extLst>
-              <a:ext uri="{FF2B5EF4-FFF2-40B4-BE49-F238E27FC236}">
-                <a16:creationId xmlns:a16="http://schemas.microsoft.com/office/drawing/2014/main" id="{C3D849D1-E4B3-F5E9-11E7-DEEF48B44640}"/>
-              </a:ext>
-            </a:extLst>
-          </p:cNvPr>
-          <p:cNvSpPr txBox="1"/>
-          <p:nvPr/>
-        </p:nvSpPr>
-        <p:spPr>
-          <a:xfrm>
-            <a:off x="252989" y="124224"/>
-            <a:ext cx="6476995" cy="6524863"/>
-          </a:xfrm>
-          <a:prstGeom prst="rect">
-            <a:avLst/>
-          </a:prstGeom>
-          <a:noFill/>
-        </p:spPr>
-        <p:txBody>
-          <a:bodyPr wrap="square">
-            <a:spAutoFit/>
-          </a:bodyPr>
-          <a:lstStyle/>
-          <a:p>
-            <a:r>
-              <a:rPr lang="en-US" sz="2200" b="1" dirty="0">
-                <a:solidFill>
-                  <a:schemeClr val="accent6">
-                    <a:lumMod val="60000"/>
-                    <a:lumOff val="40000"/>
-                  </a:schemeClr>
-                </a:solidFill>
-              </a:rPr>
-              <a:t>What Makes AI "Agentic"? </a:t>
-            </a:r>
-          </a:p>
-          <a:p>
-            <a:pPr marL="457200" indent="-457200">
-              <a:buAutoNum type="arabicPeriod"/>
-            </a:pPr>
-            <a:endParaRPr lang="en-US" sz="2200" dirty="0">
-              <a:solidFill>
-                <a:schemeClr val="accent6">
-                  <a:lumMod val="60000"/>
-                  <a:lumOff val="40000"/>
-                </a:schemeClr>
-              </a:solidFill>
-            </a:endParaRPr>
-          </a:p>
-          <a:p>
-            <a:pPr marL="457200" indent="-457200">
-              <a:buAutoNum type="arabicPeriod" startAt="4"/>
-            </a:pPr>
-            <a:r>
-              <a:rPr lang="en-US" sz="2200" b="1" dirty="0">
-                <a:solidFill>
-                  <a:schemeClr val="accent6">
-                    <a:lumMod val="60000"/>
-                    <a:lumOff val="40000"/>
-                  </a:schemeClr>
-                </a:solidFill>
-              </a:rPr>
-              <a:t>Feedback loops</a:t>
-            </a:r>
-            <a:r>
-              <a:rPr lang="en-US" sz="2200" dirty="0">
-                <a:solidFill>
-                  <a:schemeClr val="accent6">
-                    <a:lumMod val="60000"/>
-                    <a:lumOff val="40000"/>
-                  </a:schemeClr>
-                </a:solidFill>
-              </a:rPr>
-              <a:t> — Agents can evaluate their own outputs, notice errors, and retry. </a:t>
-            </a:r>
-          </a:p>
-          <a:p>
-            <a:r>
-              <a:rPr lang="en-US" sz="2200" dirty="0">
-                <a:solidFill>
-                  <a:schemeClr val="accent6">
-                    <a:lumMod val="60000"/>
-                    <a:lumOff val="40000"/>
-                  </a:schemeClr>
-                </a:solidFill>
-              </a:rPr>
-              <a:t>(E.g.: A coding agent that writes code will also run it, read the error, fix the bug, and run it again.)</a:t>
-            </a:r>
-          </a:p>
-          <a:p>
-            <a:endParaRPr lang="en-US" sz="2200" dirty="0">
-              <a:solidFill>
-                <a:schemeClr val="accent6">
-                  <a:lumMod val="60000"/>
-                  <a:lumOff val="40000"/>
-                </a:schemeClr>
-              </a:solidFill>
-            </a:endParaRPr>
-          </a:p>
-          <a:p>
-            <a:r>
-              <a:rPr lang="en-US" sz="2200" dirty="0">
-                <a:solidFill>
-                  <a:schemeClr val="accent6">
-                    <a:lumMod val="60000"/>
-                    <a:lumOff val="40000"/>
-                  </a:schemeClr>
-                </a:solidFill>
-              </a:rPr>
-              <a:t>The agent reviews its own findings to catch mistakes and refine its conclusion before final output:</a:t>
-            </a:r>
-          </a:p>
-          <a:p>
-            <a:endParaRPr lang="en-US" sz="2200" dirty="0">
-              <a:solidFill>
-                <a:schemeClr val="accent6">
-                  <a:lumMod val="60000"/>
-                  <a:lumOff val="40000"/>
-                </a:schemeClr>
-              </a:solidFill>
-            </a:endParaRPr>
-          </a:p>
-          <a:p>
-            <a:r>
-              <a:rPr lang="en-US" sz="2200" b="1" dirty="0">
-                <a:solidFill>
-                  <a:schemeClr val="accent6">
-                    <a:lumMod val="60000"/>
-                    <a:lumOff val="40000"/>
-                  </a:schemeClr>
-                </a:solidFill>
-              </a:rPr>
-              <a:t>Self-Evaluation: </a:t>
-            </a:r>
-            <a:r>
-              <a:rPr lang="en-US" sz="2200" dirty="0">
-                <a:solidFill>
-                  <a:schemeClr val="accent6">
-                    <a:lumMod val="60000"/>
-                    <a:lumOff val="40000"/>
-                  </a:schemeClr>
-                </a:solidFill>
-              </a:rPr>
-              <a:t>The agent drafts a risk score but notices its geographic analysis contradicts the client's typical device profile.</a:t>
-            </a:r>
-          </a:p>
-          <a:p>
-            <a:r>
-              <a:rPr lang="en-US" sz="2200" b="1" dirty="0">
-                <a:solidFill>
-                  <a:schemeClr val="accent6">
-                    <a:lumMod val="60000"/>
-                    <a:lumOff val="40000"/>
-                  </a:schemeClr>
-                </a:solidFill>
-              </a:rPr>
-              <a:t>Correction: </a:t>
-            </a:r>
-            <a:r>
-              <a:rPr lang="en-US" sz="2200" dirty="0">
-                <a:solidFill>
-                  <a:schemeClr val="accent6">
-                    <a:lumMod val="60000"/>
-                    <a:lumOff val="40000"/>
-                  </a:schemeClr>
-                </a:solidFill>
-              </a:rPr>
-              <a:t>It realizes the IP belongs to a commercial VPN provider. It reruns its evaluation script, updating the risk score from "medium" to "critical fraud risk."</a:t>
-            </a:r>
-          </a:p>
-          <a:p>
-            <a:r>
-              <a:rPr lang="en-US" sz="2200" b="1" dirty="0">
-                <a:solidFill>
-                  <a:schemeClr val="accent6">
-                    <a:lumMod val="60000"/>
-                    <a:lumOff val="40000"/>
-                  </a:schemeClr>
-                </a:solidFill>
-              </a:rPr>
-              <a:t>Final Action: </a:t>
-            </a:r>
-            <a:r>
-              <a:rPr lang="en-US" sz="2200" dirty="0">
-                <a:solidFill>
-                  <a:schemeClr val="accent6">
-                    <a:lumMod val="60000"/>
-                    <a:lumOff val="40000"/>
-                  </a:schemeClr>
-                </a:solidFill>
-              </a:rPr>
-              <a:t>It automatically freezes the account, blocks the transfer, and drafts an emergency alert email to the fraud operations team.</a:t>
-            </a:r>
-          </a:p>
-        </p:txBody>
-      </p:sp>
-      <p:pic>
-        <p:nvPicPr>
-          <p:cNvPr id="3" name="Picture 2">
-            <a:extLst>
-              <a:ext uri="{FF2B5EF4-FFF2-40B4-BE49-F238E27FC236}">
-                <a16:creationId xmlns:a16="http://schemas.microsoft.com/office/drawing/2014/main" id="{85A9C587-DADC-1856-7449-B19679926571}"/>
-              </a:ext>
-            </a:extLst>
-          </p:cNvPr>
-          <p:cNvPicPr>
-            <a:picLocks noChangeAspect="1"/>
-          </p:cNvPicPr>
-          <p:nvPr/>
-        </p:nvPicPr>
-        <p:blipFill>
-          <a:blip r:embed="rId2"/>
-          <a:stretch>
-            <a:fillRect/>
-          </a:stretch>
-        </p:blipFill>
-        <p:spPr>
-          <a:xfrm>
-            <a:off x="6547104" y="35472"/>
-            <a:ext cx="5644896" cy="6787055"/>
-          </a:xfrm>
-          <a:prstGeom prst="rect">
-            <a:avLst/>
-          </a:prstGeom>
-        </p:spPr>
-      </p:pic>
-    </p:spTree>
-    <p:extLst>
-      <p:ext uri="{BB962C8B-B14F-4D97-AF65-F5344CB8AC3E}">
-        <p14:creationId xmlns:p14="http://schemas.microsoft.com/office/powerpoint/2010/main" val="2437866056"/>
-      </p:ext>
-    </p:extLst>
-  </p:cSld>
-  <p:clrMapOvr>
-    <a:masterClrMapping/>
-  </p:clrMapOvr>
-</p:sld>
-</file>
-
-<file path=ppt/slides/slide11.xml><?xml version="1.0" encoding="utf-8"?>
 <p:sld xmlns:a="http://schemas.openxmlformats.org/drawingml/2006/main" xmlns:r="http://schemas.openxmlformats.org/officeDocument/2006/relationships" xmlns:p="http://schemas.openxmlformats.org/presentationml/2006/main">
   <p:cSld>
     <p:spTree>
@@ -4637,7 +4370,7 @@
 </p:sld>
 </file>
 
-<file path=ppt/slides/slide12.xml><?xml version="1.0" encoding="utf-8"?>
+<file path=ppt/slides/slide11.xml><?xml version="1.0" encoding="utf-8"?>
 <p:sld xmlns:a="http://schemas.openxmlformats.org/drawingml/2006/main" xmlns:r="http://schemas.openxmlformats.org/officeDocument/2006/relationships" xmlns:p="http://schemas.openxmlformats.org/presentationml/2006/main">
   <p:cSld>
     <p:spTree>
@@ -4789,7 +4522,7 @@
 </p:sld>
 </file>
 
-<file path=ppt/slides/slide13.xml><?xml version="1.0" encoding="utf-8"?>
+<file path=ppt/slides/slide12.xml><?xml version="1.0" encoding="utf-8"?>
 <p:sld xmlns:a="http://schemas.openxmlformats.org/drawingml/2006/main" xmlns:r="http://schemas.openxmlformats.org/officeDocument/2006/relationships" xmlns:p="http://schemas.openxmlformats.org/presentationml/2006/main">
   <p:cSld>
     <p:spTree>
@@ -5045,7 +4778,7 @@
 </p:sld>
 </file>
 
-<file path=ppt/slides/slide14.xml><?xml version="1.0" encoding="utf-8"?>
+<file path=ppt/slides/slide13.xml><?xml version="1.0" encoding="utf-8"?>
 <p:sld xmlns:a="http://schemas.openxmlformats.org/drawingml/2006/main" xmlns:r="http://schemas.openxmlformats.org/officeDocument/2006/relationships" xmlns:p="http://schemas.openxmlformats.org/presentationml/2006/main">
   <p:cSld>
     <p:spTree>
@@ -5301,7 +5034,7 @@
 </p:sld>
 </file>
 
-<file path=ppt/slides/slide15.xml><?xml version="1.0" encoding="utf-8"?>
+<file path=ppt/slides/slide14.xml><?xml version="1.0" encoding="utf-8"?>
 <p:sld xmlns:a="http://schemas.openxmlformats.org/drawingml/2006/main" xmlns:r="http://schemas.openxmlformats.org/officeDocument/2006/relationships" xmlns:p="http://schemas.openxmlformats.org/presentationml/2006/main">
   <p:cSld>
     <p:spTree>
@@ -5572,7 +5305,7 @@
 </p:sld>
 </file>
 
-<file path=ppt/slides/slide16.xml><?xml version="1.0" encoding="utf-8"?>
+<file path=ppt/slides/slide15.xml><?xml version="1.0" encoding="utf-8"?>
 <p:sld xmlns:a="http://schemas.openxmlformats.org/drawingml/2006/main" xmlns:r="http://schemas.openxmlformats.org/officeDocument/2006/relationships" xmlns:p="http://schemas.openxmlformats.org/presentationml/2006/main">
   <p:cSld>
     <p:spTree>
@@ -5840,7 +5573,7 @@
 </p:sld>
 </file>
 
-<file path=ppt/slides/slide17.xml><?xml version="1.0" encoding="utf-8"?>
+<file path=ppt/slides/slide16.xml><?xml version="1.0" encoding="utf-8"?>
 <p:sld xmlns:a="http://schemas.openxmlformats.org/drawingml/2006/main" xmlns:r="http://schemas.openxmlformats.org/officeDocument/2006/relationships" xmlns:p="http://schemas.openxmlformats.org/presentationml/2006/main">
   <p:cSld>
     <p:spTree>
@@ -5863,6 +5596,49 @@
           <a:chExt cx="0" cy="0"/>
         </a:xfrm>
       </p:grpSpPr>
+      <p:sp>
+        <p:nvSpPr>
+          <p:cNvPr id="3" name="TextBox 2">
+            <a:extLst>
+              <a:ext uri="{FF2B5EF4-FFF2-40B4-BE49-F238E27FC236}">
+                <a16:creationId xmlns:a16="http://schemas.microsoft.com/office/drawing/2014/main" id="{5B424BD1-6C64-1E90-592F-A4F1C4A1E6F6}"/>
+              </a:ext>
+            </a:extLst>
+          </p:cNvPr>
+          <p:cNvSpPr txBox="1"/>
+          <p:nvPr/>
+        </p:nvSpPr>
+        <p:spPr>
+          <a:xfrm>
+            <a:off x="3000756" y="2329934"/>
+            <a:ext cx="6190488" cy="954107"/>
+          </a:xfrm>
+          <a:prstGeom prst="rect">
+            <a:avLst/>
+          </a:prstGeom>
+          <a:noFill/>
+        </p:spPr>
+        <p:txBody>
+          <a:bodyPr wrap="square">
+            <a:spAutoFit/>
+          </a:bodyPr>
+          <a:lstStyle/>
+          <a:p>
+            <a:pPr algn="ctr"/>
+            <a:r>
+              <a:rPr lang="en-US" sz="2800" dirty="0">
+                <a:solidFill>
+                  <a:schemeClr val="accent6">
+                    <a:lumMod val="60000"/>
+                    <a:lumOff val="40000"/>
+                  </a:schemeClr>
+                </a:solidFill>
+              </a:rPr>
+              <a:t>Use Case: Agentic AI for Real-Time Fraud Detection &amp; Response</a:t>
+            </a:r>
+          </a:p>
+        </p:txBody>
+      </p:sp>
     </p:spTree>
     <p:extLst>
       <p:ext uri="{BB962C8B-B14F-4D97-AF65-F5344CB8AC3E}">
@@ -5876,7 +5652,7 @@
 </p:sld>
 </file>
 
-<file path=ppt/slides/slide18.xml><?xml version="1.0" encoding="utf-8"?>
+<file path=ppt/slides/slide17.xml><?xml version="1.0" encoding="utf-8"?>
 <p:sld xmlns:a="http://schemas.openxmlformats.org/drawingml/2006/main" xmlns:r="http://schemas.openxmlformats.org/officeDocument/2006/relationships" xmlns:p="http://schemas.openxmlformats.org/presentationml/2006/main">
   <p:cSld>
     <p:spTree>
@@ -6264,7 +6040,7 @@
 </p:sld>
 </file>
 
-<file path=ppt/slides/slide19.xml><?xml version="1.0" encoding="utf-8"?>
+<file path=ppt/slides/slide18.xml><?xml version="1.0" encoding="utf-8"?>
 <p:sld xmlns:a="http://schemas.openxmlformats.org/drawingml/2006/main" xmlns:r="http://schemas.openxmlformats.org/officeDocument/2006/relationships" xmlns:p="http://schemas.openxmlformats.org/presentationml/2006/main">
   <p:cSld>
     <p:spTree>
@@ -6452,6 +6228,216 @@
     <p:extLst>
       <p:ext uri="{BB962C8B-B14F-4D97-AF65-F5344CB8AC3E}">
         <p14:creationId xmlns:p14="http://schemas.microsoft.com/office/powerpoint/2010/main" val="682937517"/>
+      </p:ext>
+    </p:extLst>
+  </p:cSld>
+  <p:clrMapOvr>
+    <a:masterClrMapping/>
+  </p:clrMapOvr>
+</p:sld>
+</file>
+
+<file path=ppt/slides/slide19.xml><?xml version="1.0" encoding="utf-8"?>
+<p:sld xmlns:a="http://schemas.openxmlformats.org/drawingml/2006/main" xmlns:r="http://schemas.openxmlformats.org/officeDocument/2006/relationships" xmlns:p="http://schemas.openxmlformats.org/presentationml/2006/main">
+  <p:cSld>
+    <p:spTree>
+      <p:nvGrpSpPr>
+        <p:cNvPr id="1" name="">
+          <a:extLst>
+            <a:ext uri="{FF2B5EF4-FFF2-40B4-BE49-F238E27FC236}">
+              <a16:creationId xmlns:a16="http://schemas.microsoft.com/office/drawing/2014/main" id="{3E12C28F-C4A1-CAB4-0CC6-9A066F9891C6}"/>
+            </a:ext>
+          </a:extLst>
+        </p:cNvPr>
+        <p:cNvGrpSpPr/>
+        <p:nvPr/>
+      </p:nvGrpSpPr>
+      <p:grpSpPr>
+        <a:xfrm>
+          <a:off x="0" y="0"/>
+          <a:ext cx="0" cy="0"/>
+          <a:chOff x="0" y="0"/>
+          <a:chExt cx="0" cy="0"/>
+        </a:xfrm>
+      </p:grpSpPr>
+      <p:pic>
+        <p:nvPicPr>
+          <p:cNvPr id="3" name="Picture 2">
+            <a:extLst>
+              <a:ext uri="{FF2B5EF4-FFF2-40B4-BE49-F238E27FC236}">
+                <a16:creationId xmlns:a16="http://schemas.microsoft.com/office/drawing/2014/main" id="{E6D811BC-5E15-A773-878D-17A54F1E8FE7}"/>
+              </a:ext>
+            </a:extLst>
+          </p:cNvPr>
+          <p:cNvPicPr>
+            <a:picLocks noChangeAspect="1"/>
+          </p:cNvPicPr>
+          <p:nvPr/>
+        </p:nvPicPr>
+        <p:blipFill>
+          <a:blip r:embed="rId2"/>
+          <a:stretch>
+            <a:fillRect/>
+          </a:stretch>
+        </p:blipFill>
+        <p:spPr>
+          <a:xfrm>
+            <a:off x="5413248" y="55866"/>
+            <a:ext cx="6909482" cy="3057687"/>
+          </a:xfrm>
+          <a:prstGeom prst="rect">
+            <a:avLst/>
+          </a:prstGeom>
+        </p:spPr>
+      </p:pic>
+      <p:pic>
+        <p:nvPicPr>
+          <p:cNvPr id="5" name="Picture 4">
+            <a:extLst>
+              <a:ext uri="{FF2B5EF4-FFF2-40B4-BE49-F238E27FC236}">
+                <a16:creationId xmlns:a16="http://schemas.microsoft.com/office/drawing/2014/main" id="{DC856599-180D-64B5-3178-802B14558359}"/>
+              </a:ext>
+            </a:extLst>
+          </p:cNvPr>
+          <p:cNvPicPr>
+            <a:picLocks noChangeAspect="1"/>
+          </p:cNvPicPr>
+          <p:nvPr/>
+        </p:nvPicPr>
+        <p:blipFill>
+          <a:blip r:embed="rId3"/>
+          <a:stretch>
+            <a:fillRect/>
+          </a:stretch>
+        </p:blipFill>
+        <p:spPr>
+          <a:xfrm>
+            <a:off x="5803277" y="3191256"/>
+            <a:ext cx="6052148" cy="3296434"/>
+          </a:xfrm>
+          <a:prstGeom prst="rect">
+            <a:avLst/>
+          </a:prstGeom>
+        </p:spPr>
+      </p:pic>
+      <p:sp>
+        <p:nvSpPr>
+          <p:cNvPr id="7" name="TextBox 6">
+            <a:extLst>
+              <a:ext uri="{FF2B5EF4-FFF2-40B4-BE49-F238E27FC236}">
+                <a16:creationId xmlns:a16="http://schemas.microsoft.com/office/drawing/2014/main" id="{5DEE8E23-A2A2-F5EE-C146-5D420BF3CE72}"/>
+              </a:ext>
+            </a:extLst>
+          </p:cNvPr>
+          <p:cNvSpPr txBox="1"/>
+          <p:nvPr/>
+        </p:nvSpPr>
+        <p:spPr>
+          <a:xfrm>
+            <a:off x="114300" y="266178"/>
+            <a:ext cx="5518404" cy="3046988"/>
+          </a:xfrm>
+          <a:prstGeom prst="rect">
+            <a:avLst/>
+          </a:prstGeom>
+          <a:noFill/>
+        </p:spPr>
+        <p:txBody>
+          <a:bodyPr wrap="square">
+            <a:spAutoFit/>
+          </a:bodyPr>
+          <a:lstStyle/>
+          <a:p>
+            <a:pPr>
+              <a:buNone/>
+            </a:pPr>
+            <a:r>
+              <a:rPr lang="en-US" sz="2400" b="1" dirty="0">
+                <a:solidFill>
+                  <a:schemeClr val="accent6">
+                    <a:lumMod val="60000"/>
+                    <a:lumOff val="40000"/>
+                  </a:schemeClr>
+                </a:solidFill>
+              </a:rPr>
+              <a:t>Step 2 — Agent Activated</a:t>
+            </a:r>
+          </a:p>
+          <a:p>
+            <a:pPr>
+              <a:buNone/>
+            </a:pPr>
+            <a:r>
+              <a:rPr lang="en-US" sz="2400" dirty="0">
+                <a:solidFill>
+                  <a:schemeClr val="accent6">
+                    <a:lumMod val="60000"/>
+                    <a:lumOff val="40000"/>
+                  </a:schemeClr>
+                </a:solidFill>
+              </a:rPr>
+              <a:t>Instead of a static rule simply blocking or allowing, an agentic AI wakes up. </a:t>
+            </a:r>
+          </a:p>
+          <a:p>
+            <a:pPr>
+              <a:buNone/>
+            </a:pPr>
+            <a:endParaRPr lang="en-US" sz="2400" dirty="0">
+              <a:solidFill>
+                <a:schemeClr val="accent6">
+                  <a:lumMod val="60000"/>
+                  <a:lumOff val="40000"/>
+                </a:schemeClr>
+              </a:solidFill>
+            </a:endParaRPr>
+          </a:p>
+          <a:p>
+            <a:pPr>
+              <a:buNone/>
+            </a:pPr>
+            <a:r>
+              <a:rPr lang="en-US" sz="2400" dirty="0">
+                <a:solidFill>
+                  <a:schemeClr val="accent6">
+                    <a:lumMod val="60000"/>
+                    <a:lumOff val="40000"/>
+                  </a:schemeClr>
+                </a:solidFill>
+              </a:rPr>
+              <a:t>It receives the transaction object as its "goal": </a:t>
+            </a:r>
+          </a:p>
+          <a:p>
+            <a:pPr>
+              <a:buNone/>
+            </a:pPr>
+            <a:r>
+              <a:rPr lang="en-US" sz="2400" i="1" dirty="0">
+                <a:solidFill>
+                  <a:schemeClr val="accent6">
+                    <a:lumMod val="60000"/>
+                    <a:lumOff val="40000"/>
+                  </a:schemeClr>
+                </a:solidFill>
+              </a:rPr>
+              <a:t>Evaluate whether this is fraudulent and take appropriate action.</a:t>
+            </a:r>
+            <a:endParaRPr lang="en-US" sz="2400" dirty="0">
+              <a:solidFill>
+                <a:schemeClr val="accent6">
+                  <a:lumMod val="60000"/>
+                  <a:lumOff val="40000"/>
+                </a:schemeClr>
+              </a:solidFill>
+            </a:endParaRPr>
+          </a:p>
+        </p:txBody>
+      </p:sp>
+    </p:spTree>
+    <p:extLst>
+      <p:ext uri="{BB962C8B-B14F-4D97-AF65-F5344CB8AC3E}">
+        <p14:creationId xmlns:p14="http://schemas.microsoft.com/office/powerpoint/2010/main" val="2459926317"/>
       </p:ext>
     </p:extLst>
   </p:cSld>
@@ -6995,7 +6981,7 @@
         <p:cNvPr id="1" name="">
           <a:extLst>
             <a:ext uri="{FF2B5EF4-FFF2-40B4-BE49-F238E27FC236}">
-              <a16:creationId xmlns:a16="http://schemas.microsoft.com/office/drawing/2014/main" id="{3E12C28F-C4A1-CAB4-0CC6-9A066F9891C6}"/>
+              <a16:creationId xmlns:a16="http://schemas.microsoft.com/office/drawing/2014/main" id="{121107A6-FD45-A157-EEB2-3F2BCB1B51B0}"/>
             </a:ext>
           </a:extLst>
         </p:cNvPr>
@@ -7015,7 +7001,7 @@
           <p:cNvPr id="3" name="Picture 2">
             <a:extLst>
               <a:ext uri="{FF2B5EF4-FFF2-40B4-BE49-F238E27FC236}">
-                <a16:creationId xmlns:a16="http://schemas.microsoft.com/office/drawing/2014/main" id="{E6D811BC-5E15-A773-878D-17A54F1E8FE7}"/>
+                <a16:creationId xmlns:a16="http://schemas.microsoft.com/office/drawing/2014/main" id="{1CB4F951-9C01-2B92-4EB6-90E3D9EF884A}"/>
               </a:ext>
             </a:extLst>
           </p:cNvPr>
@@ -7045,7 +7031,7 @@
           <p:cNvPr id="5" name="Picture 4">
             <a:extLst>
               <a:ext uri="{FF2B5EF4-FFF2-40B4-BE49-F238E27FC236}">
-                <a16:creationId xmlns:a16="http://schemas.microsoft.com/office/drawing/2014/main" id="{DC856599-180D-64B5-3178-802B14558359}"/>
+                <a16:creationId xmlns:a16="http://schemas.microsoft.com/office/drawing/2014/main" id="{DB300987-BF7D-1EB8-C578-2692B6E423C9}"/>
               </a:ext>
             </a:extLst>
           </p:cNvPr>
@@ -7075,216 +7061,6 @@
           <p:cNvPr id="7" name="TextBox 6">
             <a:extLst>
               <a:ext uri="{FF2B5EF4-FFF2-40B4-BE49-F238E27FC236}">
-                <a16:creationId xmlns:a16="http://schemas.microsoft.com/office/drawing/2014/main" id="{5DEE8E23-A2A2-F5EE-C146-5D420BF3CE72}"/>
-              </a:ext>
-            </a:extLst>
-          </p:cNvPr>
-          <p:cNvSpPr txBox="1"/>
-          <p:nvPr/>
-        </p:nvSpPr>
-        <p:spPr>
-          <a:xfrm>
-            <a:off x="114300" y="266178"/>
-            <a:ext cx="5518404" cy="3046988"/>
-          </a:xfrm>
-          <a:prstGeom prst="rect">
-            <a:avLst/>
-          </a:prstGeom>
-          <a:noFill/>
-        </p:spPr>
-        <p:txBody>
-          <a:bodyPr wrap="square">
-            <a:spAutoFit/>
-          </a:bodyPr>
-          <a:lstStyle/>
-          <a:p>
-            <a:pPr>
-              <a:buNone/>
-            </a:pPr>
-            <a:r>
-              <a:rPr lang="en-US" sz="2400" b="1" dirty="0">
-                <a:solidFill>
-                  <a:schemeClr val="accent6">
-                    <a:lumMod val="60000"/>
-                    <a:lumOff val="40000"/>
-                  </a:schemeClr>
-                </a:solidFill>
-              </a:rPr>
-              <a:t>Step 2 — Agent Activated</a:t>
-            </a:r>
-          </a:p>
-          <a:p>
-            <a:pPr>
-              <a:buNone/>
-            </a:pPr>
-            <a:r>
-              <a:rPr lang="en-US" sz="2400" dirty="0">
-                <a:solidFill>
-                  <a:schemeClr val="accent6">
-                    <a:lumMod val="60000"/>
-                    <a:lumOff val="40000"/>
-                  </a:schemeClr>
-                </a:solidFill>
-              </a:rPr>
-              <a:t>Instead of a static rule simply blocking or allowing, an agentic AI wakes up. </a:t>
-            </a:r>
-          </a:p>
-          <a:p>
-            <a:pPr>
-              <a:buNone/>
-            </a:pPr>
-            <a:endParaRPr lang="en-US" sz="2400" dirty="0">
-              <a:solidFill>
-                <a:schemeClr val="accent6">
-                  <a:lumMod val="60000"/>
-                  <a:lumOff val="40000"/>
-                </a:schemeClr>
-              </a:solidFill>
-            </a:endParaRPr>
-          </a:p>
-          <a:p>
-            <a:pPr>
-              <a:buNone/>
-            </a:pPr>
-            <a:r>
-              <a:rPr lang="en-US" sz="2400" dirty="0">
-                <a:solidFill>
-                  <a:schemeClr val="accent6">
-                    <a:lumMod val="60000"/>
-                    <a:lumOff val="40000"/>
-                  </a:schemeClr>
-                </a:solidFill>
-              </a:rPr>
-              <a:t>It receives the transaction object as its "goal": </a:t>
-            </a:r>
-          </a:p>
-          <a:p>
-            <a:pPr>
-              <a:buNone/>
-            </a:pPr>
-            <a:r>
-              <a:rPr lang="en-US" sz="2400" i="1" dirty="0">
-                <a:solidFill>
-                  <a:schemeClr val="accent6">
-                    <a:lumMod val="60000"/>
-                    <a:lumOff val="40000"/>
-                  </a:schemeClr>
-                </a:solidFill>
-              </a:rPr>
-              <a:t>Evaluate whether this is fraudulent and take appropriate action.</a:t>
-            </a:r>
-            <a:endParaRPr lang="en-US" sz="2400" dirty="0">
-              <a:solidFill>
-                <a:schemeClr val="accent6">
-                  <a:lumMod val="60000"/>
-                  <a:lumOff val="40000"/>
-                </a:schemeClr>
-              </a:solidFill>
-            </a:endParaRPr>
-          </a:p>
-        </p:txBody>
-      </p:sp>
-    </p:spTree>
-    <p:extLst>
-      <p:ext uri="{BB962C8B-B14F-4D97-AF65-F5344CB8AC3E}">
-        <p14:creationId xmlns:p14="http://schemas.microsoft.com/office/powerpoint/2010/main" val="2459926317"/>
-      </p:ext>
-    </p:extLst>
-  </p:cSld>
-  <p:clrMapOvr>
-    <a:masterClrMapping/>
-  </p:clrMapOvr>
-</p:sld>
-</file>
-
-<file path=ppt/slides/slide21.xml><?xml version="1.0" encoding="utf-8"?>
-<p:sld xmlns:a="http://schemas.openxmlformats.org/drawingml/2006/main" xmlns:r="http://schemas.openxmlformats.org/officeDocument/2006/relationships" xmlns:p="http://schemas.openxmlformats.org/presentationml/2006/main">
-  <p:cSld>
-    <p:spTree>
-      <p:nvGrpSpPr>
-        <p:cNvPr id="1" name="">
-          <a:extLst>
-            <a:ext uri="{FF2B5EF4-FFF2-40B4-BE49-F238E27FC236}">
-              <a16:creationId xmlns:a16="http://schemas.microsoft.com/office/drawing/2014/main" id="{121107A6-FD45-A157-EEB2-3F2BCB1B51B0}"/>
-            </a:ext>
-          </a:extLst>
-        </p:cNvPr>
-        <p:cNvGrpSpPr/>
-        <p:nvPr/>
-      </p:nvGrpSpPr>
-      <p:grpSpPr>
-        <a:xfrm>
-          <a:off x="0" y="0"/>
-          <a:ext cx="0" cy="0"/>
-          <a:chOff x="0" y="0"/>
-          <a:chExt cx="0" cy="0"/>
-        </a:xfrm>
-      </p:grpSpPr>
-      <p:pic>
-        <p:nvPicPr>
-          <p:cNvPr id="3" name="Picture 2">
-            <a:extLst>
-              <a:ext uri="{FF2B5EF4-FFF2-40B4-BE49-F238E27FC236}">
-                <a16:creationId xmlns:a16="http://schemas.microsoft.com/office/drawing/2014/main" id="{1CB4F951-9C01-2B92-4EB6-90E3D9EF884A}"/>
-              </a:ext>
-            </a:extLst>
-          </p:cNvPr>
-          <p:cNvPicPr>
-            <a:picLocks noChangeAspect="1"/>
-          </p:cNvPicPr>
-          <p:nvPr/>
-        </p:nvPicPr>
-        <p:blipFill>
-          <a:blip r:embed="rId2"/>
-          <a:stretch>
-            <a:fillRect/>
-          </a:stretch>
-        </p:blipFill>
-        <p:spPr>
-          <a:xfrm>
-            <a:off x="5413248" y="55866"/>
-            <a:ext cx="6909482" cy="3057687"/>
-          </a:xfrm>
-          <a:prstGeom prst="rect">
-            <a:avLst/>
-          </a:prstGeom>
-        </p:spPr>
-      </p:pic>
-      <p:pic>
-        <p:nvPicPr>
-          <p:cNvPr id="5" name="Picture 4">
-            <a:extLst>
-              <a:ext uri="{FF2B5EF4-FFF2-40B4-BE49-F238E27FC236}">
-                <a16:creationId xmlns:a16="http://schemas.microsoft.com/office/drawing/2014/main" id="{DB300987-BF7D-1EB8-C578-2692B6E423C9}"/>
-              </a:ext>
-            </a:extLst>
-          </p:cNvPr>
-          <p:cNvPicPr>
-            <a:picLocks noChangeAspect="1"/>
-          </p:cNvPicPr>
-          <p:nvPr/>
-        </p:nvPicPr>
-        <p:blipFill>
-          <a:blip r:embed="rId3"/>
-          <a:stretch>
-            <a:fillRect/>
-          </a:stretch>
-        </p:blipFill>
-        <p:spPr>
-          <a:xfrm>
-            <a:off x="5803277" y="3191256"/>
-            <a:ext cx="6052148" cy="3296434"/>
-          </a:xfrm>
-          <a:prstGeom prst="rect">
-            <a:avLst/>
-          </a:prstGeom>
-        </p:spPr>
-      </p:pic>
-      <p:sp>
-        <p:nvSpPr>
-          <p:cNvPr id="7" name="TextBox 6">
-            <a:extLst>
-              <a:ext uri="{FF2B5EF4-FFF2-40B4-BE49-F238E27FC236}">
                 <a16:creationId xmlns:a16="http://schemas.microsoft.com/office/drawing/2014/main" id="{FFA4D9C5-537B-BC68-5BD2-8742A588074A}"/>
               </a:ext>
             </a:extLst>
@@ -7480,7 +7256,7 @@
 </p:sld>
 </file>
 
-<file path=ppt/slides/slide22.xml><?xml version="1.0" encoding="utf-8"?>
+<file path=ppt/slides/slide21.xml><?xml version="1.0" encoding="utf-8"?>
 <p:sld xmlns:a="http://schemas.openxmlformats.org/drawingml/2006/main" xmlns:r="http://schemas.openxmlformats.org/officeDocument/2006/relationships" xmlns:p="http://schemas.openxmlformats.org/presentationml/2006/main">
   <p:cSld>
     <p:spTree>
@@ -7751,7 +7527,7 @@
 </p:sld>
 </file>
 
-<file path=ppt/slides/slide23.xml><?xml version="1.0" encoding="utf-8"?>
+<file path=ppt/slides/slide22.xml><?xml version="1.0" encoding="utf-8"?>
 <p:sld xmlns:a="http://schemas.openxmlformats.org/drawingml/2006/main" xmlns:r="http://schemas.openxmlformats.org/officeDocument/2006/relationships" xmlns:p="http://schemas.openxmlformats.org/presentationml/2006/main">
   <p:cSld>
     <p:spTree>
@@ -8052,7 +7828,7 @@
 </p:sld>
 </file>
 
-<file path=ppt/slides/slide24.xml><?xml version="1.0" encoding="utf-8"?>
+<file path=ppt/slides/slide23.xml><?xml version="1.0" encoding="utf-8"?>
 <p:sld xmlns:a="http://schemas.openxmlformats.org/drawingml/2006/main" xmlns:r="http://schemas.openxmlformats.org/officeDocument/2006/relationships" xmlns:p="http://schemas.openxmlformats.org/presentationml/2006/main">
   <p:cSld>
     <p:spTree>
@@ -8262,7 +8038,7 @@
 </p:sld>
 </file>
 
-<file path=ppt/slides/slide25.xml><?xml version="1.0" encoding="utf-8"?>
+<file path=ppt/slides/slide24.xml><?xml version="1.0" encoding="utf-8"?>
 <p:sld xmlns:a="http://schemas.openxmlformats.org/drawingml/2006/main" xmlns:r="http://schemas.openxmlformats.org/officeDocument/2006/relationships" xmlns:p="http://schemas.openxmlformats.org/presentationml/2006/main">
   <p:cSld>
     <p:spTree>
@@ -8438,7 +8214,7 @@
 </p:sld>
 </file>
 
-<file path=ppt/slides/slide26.xml><?xml version="1.0" encoding="utf-8"?>
+<file path=ppt/slides/slide25.xml><?xml version="1.0" encoding="utf-8"?>
 <p:sld xmlns:a="http://schemas.openxmlformats.org/drawingml/2006/main" xmlns:r="http://schemas.openxmlformats.org/officeDocument/2006/relationships" xmlns:p="http://schemas.openxmlformats.org/presentationml/2006/main">
   <p:cSld>
     <p:spTree>
@@ -8661,7 +8437,7 @@
 </p:sld>
 </file>
 
-<file path=ppt/slides/slide27.xml><?xml version="1.0" encoding="utf-8"?>
+<file path=ppt/slides/slide26.xml><?xml version="1.0" encoding="utf-8"?>
 <p:sld xmlns:a="http://schemas.openxmlformats.org/drawingml/2006/main" xmlns:r="http://schemas.openxmlformats.org/officeDocument/2006/relationships" xmlns:p="http://schemas.openxmlformats.org/presentationml/2006/main">
   <p:cSld>
     <p:spTree>
@@ -9073,42 +8849,6 @@
         <p:cNvPr id="1" name="">
           <a:extLst>
             <a:ext uri="{FF2B5EF4-FFF2-40B4-BE49-F238E27FC236}">
-              <a16:creationId xmlns:a16="http://schemas.microsoft.com/office/drawing/2014/main" id="{802EA58B-47E9-2B8D-6DC3-4C4D6592C4F7}"/>
-            </a:ext>
-          </a:extLst>
-        </p:cNvPr>
-        <p:cNvGrpSpPr/>
-        <p:nvPr/>
-      </p:nvGrpSpPr>
-      <p:grpSpPr>
-        <a:xfrm>
-          <a:off x="0" y="0"/>
-          <a:ext cx="0" cy="0"/>
-          <a:chOff x="0" y="0"/>
-          <a:chExt cx="0" cy="0"/>
-        </a:xfrm>
-      </p:grpSpPr>
-    </p:spTree>
-    <p:extLst>
-      <p:ext uri="{BB962C8B-B14F-4D97-AF65-F5344CB8AC3E}">
-        <p14:creationId xmlns:p14="http://schemas.microsoft.com/office/powerpoint/2010/main" val="3766978409"/>
-      </p:ext>
-    </p:extLst>
-  </p:cSld>
-  <p:clrMapOvr>
-    <a:masterClrMapping/>
-  </p:clrMapOvr>
-</p:sld>
-</file>
-
-<file path=ppt/slides/slide6.xml><?xml version="1.0" encoding="utf-8"?>
-<p:sld xmlns:a="http://schemas.openxmlformats.org/drawingml/2006/main" xmlns:r="http://schemas.openxmlformats.org/officeDocument/2006/relationships" xmlns:p="http://schemas.openxmlformats.org/presentationml/2006/main">
-  <p:cSld>
-    <p:spTree>
-      <p:nvGrpSpPr>
-        <p:cNvPr id="1" name="">
-          <a:extLst>
-            <a:ext uri="{FF2B5EF4-FFF2-40B4-BE49-F238E27FC236}">
               <a16:creationId xmlns:a16="http://schemas.microsoft.com/office/drawing/2014/main" id="{390C5D59-2CFD-5AAB-71D2-1918B2EEFEC6}"/>
             </a:ext>
           </a:extLst>
@@ -9323,7 +9063,7 @@
 </p:sld>
 </file>
 
-<file path=ppt/slides/slide7.xml><?xml version="1.0" encoding="utf-8"?>
+<file path=ppt/slides/slide6.xml><?xml version="1.0" encoding="utf-8"?>
 <p:sld xmlns:a="http://schemas.openxmlformats.org/drawingml/2006/main" xmlns:r="http://schemas.openxmlformats.org/officeDocument/2006/relationships" xmlns:p="http://schemas.openxmlformats.org/presentationml/2006/main">
   <p:cSld>
     <p:spTree>
@@ -9621,7 +9361,7 @@
 </p:sld>
 </file>
 
-<file path=ppt/slides/slide8.xml><?xml version="1.0" encoding="utf-8"?>
+<file path=ppt/slides/slide7.xml><?xml version="1.0" encoding="utf-8"?>
 <p:sld xmlns:a="http://schemas.openxmlformats.org/drawingml/2006/main" xmlns:r="http://schemas.openxmlformats.org/officeDocument/2006/relationships" xmlns:p="http://schemas.openxmlformats.org/presentationml/2006/main">
   <p:cSld>
     <p:spTree>
@@ -9951,7 +9691,7 @@
 </p:sld>
 </file>
 
-<file path=ppt/slides/slide9.xml><?xml version="1.0" encoding="utf-8"?>
+<file path=ppt/slides/slide8.xml><?xml version="1.0" encoding="utf-8"?>
 <p:sld xmlns:a="http://schemas.openxmlformats.org/drawingml/2006/main" xmlns:r="http://schemas.openxmlformats.org/officeDocument/2006/relationships" xmlns:p="http://schemas.openxmlformats.org/presentationml/2006/main">
   <p:cSld>
     <p:spTree>
@@ -10158,6 +9898,272 @@
     <p:extLst>
       <p:ext uri="{BB962C8B-B14F-4D97-AF65-F5344CB8AC3E}">
         <p14:creationId xmlns:p14="http://schemas.microsoft.com/office/powerpoint/2010/main" val="2062403306"/>
+      </p:ext>
+    </p:extLst>
+  </p:cSld>
+  <p:clrMapOvr>
+    <a:masterClrMapping/>
+  </p:clrMapOvr>
+</p:sld>
+</file>
+
+<file path=ppt/slides/slide9.xml><?xml version="1.0" encoding="utf-8"?>
+<p:sld xmlns:a="http://schemas.openxmlformats.org/drawingml/2006/main" xmlns:r="http://schemas.openxmlformats.org/officeDocument/2006/relationships" xmlns:p="http://schemas.openxmlformats.org/presentationml/2006/main">
+  <p:cSld>
+    <p:spTree>
+      <p:nvGrpSpPr>
+        <p:cNvPr id="1" name="">
+          <a:extLst>
+            <a:ext uri="{FF2B5EF4-FFF2-40B4-BE49-F238E27FC236}">
+              <a16:creationId xmlns:a16="http://schemas.microsoft.com/office/drawing/2014/main" id="{861E33C1-2944-B406-C85A-9F52C42B7714}"/>
+            </a:ext>
+          </a:extLst>
+        </p:cNvPr>
+        <p:cNvGrpSpPr/>
+        <p:nvPr/>
+      </p:nvGrpSpPr>
+      <p:grpSpPr>
+        <a:xfrm>
+          <a:off x="0" y="0"/>
+          <a:ext cx="0" cy="0"/>
+          <a:chOff x="0" y="0"/>
+          <a:chExt cx="0" cy="0"/>
+        </a:xfrm>
+      </p:grpSpPr>
+      <p:sp>
+        <p:nvSpPr>
+          <p:cNvPr id="9" name="TextBox 8">
+            <a:extLst>
+              <a:ext uri="{FF2B5EF4-FFF2-40B4-BE49-F238E27FC236}">
+                <a16:creationId xmlns:a16="http://schemas.microsoft.com/office/drawing/2014/main" id="{C3D849D1-E4B3-F5E9-11E7-DEEF48B44640}"/>
+              </a:ext>
+            </a:extLst>
+          </p:cNvPr>
+          <p:cNvSpPr txBox="1"/>
+          <p:nvPr/>
+        </p:nvSpPr>
+        <p:spPr>
+          <a:xfrm>
+            <a:off x="252989" y="124224"/>
+            <a:ext cx="6476995" cy="6524863"/>
+          </a:xfrm>
+          <a:prstGeom prst="rect">
+            <a:avLst/>
+          </a:prstGeom>
+          <a:noFill/>
+        </p:spPr>
+        <p:txBody>
+          <a:bodyPr wrap="square">
+            <a:spAutoFit/>
+          </a:bodyPr>
+          <a:lstStyle/>
+          <a:p>
+            <a:r>
+              <a:rPr lang="en-US" sz="2200" b="1" dirty="0">
+                <a:solidFill>
+                  <a:schemeClr val="accent6">
+                    <a:lumMod val="60000"/>
+                    <a:lumOff val="40000"/>
+                  </a:schemeClr>
+                </a:solidFill>
+              </a:rPr>
+              <a:t>What Makes AI "Agentic"? </a:t>
+            </a:r>
+          </a:p>
+          <a:p>
+            <a:pPr marL="457200" indent="-457200">
+              <a:buAutoNum type="arabicPeriod"/>
+            </a:pPr>
+            <a:endParaRPr lang="en-US" sz="2200" dirty="0">
+              <a:solidFill>
+                <a:schemeClr val="accent6">
+                  <a:lumMod val="60000"/>
+                  <a:lumOff val="40000"/>
+                </a:schemeClr>
+              </a:solidFill>
+            </a:endParaRPr>
+          </a:p>
+          <a:p>
+            <a:pPr marL="457200" indent="-457200">
+              <a:buAutoNum type="arabicPeriod" startAt="4"/>
+            </a:pPr>
+            <a:r>
+              <a:rPr lang="en-US" sz="2200" b="1" dirty="0">
+                <a:solidFill>
+                  <a:schemeClr val="accent6">
+                    <a:lumMod val="60000"/>
+                    <a:lumOff val="40000"/>
+                  </a:schemeClr>
+                </a:solidFill>
+              </a:rPr>
+              <a:t>Feedback loops</a:t>
+            </a:r>
+            <a:r>
+              <a:rPr lang="en-US" sz="2200" dirty="0">
+                <a:solidFill>
+                  <a:schemeClr val="accent6">
+                    <a:lumMod val="60000"/>
+                    <a:lumOff val="40000"/>
+                  </a:schemeClr>
+                </a:solidFill>
+              </a:rPr>
+              <a:t> — Agents can evaluate their own outputs, notice errors, and retry. </a:t>
+            </a:r>
+          </a:p>
+          <a:p>
+            <a:r>
+              <a:rPr lang="en-US" sz="2200" dirty="0">
+                <a:solidFill>
+                  <a:schemeClr val="accent6">
+                    <a:lumMod val="60000"/>
+                    <a:lumOff val="40000"/>
+                  </a:schemeClr>
+                </a:solidFill>
+              </a:rPr>
+              <a:t>(E.g.: A coding agent that writes code will also run it, read the error, fix the bug, and run it again.)</a:t>
+            </a:r>
+          </a:p>
+          <a:p>
+            <a:endParaRPr lang="en-US" sz="2200" dirty="0">
+              <a:solidFill>
+                <a:schemeClr val="accent6">
+                  <a:lumMod val="60000"/>
+                  <a:lumOff val="40000"/>
+                </a:schemeClr>
+              </a:solidFill>
+            </a:endParaRPr>
+          </a:p>
+          <a:p>
+            <a:r>
+              <a:rPr lang="en-US" sz="2200" dirty="0">
+                <a:solidFill>
+                  <a:schemeClr val="accent6">
+                    <a:lumMod val="60000"/>
+                    <a:lumOff val="40000"/>
+                  </a:schemeClr>
+                </a:solidFill>
+              </a:rPr>
+              <a:t>The agent reviews its own findings to catch mistakes and refine its conclusion before final output:</a:t>
+            </a:r>
+          </a:p>
+          <a:p>
+            <a:endParaRPr lang="en-US" sz="2200" dirty="0">
+              <a:solidFill>
+                <a:schemeClr val="accent6">
+                  <a:lumMod val="60000"/>
+                  <a:lumOff val="40000"/>
+                </a:schemeClr>
+              </a:solidFill>
+            </a:endParaRPr>
+          </a:p>
+          <a:p>
+            <a:r>
+              <a:rPr lang="en-US" sz="2200" b="1" dirty="0">
+                <a:solidFill>
+                  <a:schemeClr val="accent6">
+                    <a:lumMod val="60000"/>
+                    <a:lumOff val="40000"/>
+                  </a:schemeClr>
+                </a:solidFill>
+              </a:rPr>
+              <a:t>Self-Evaluation: </a:t>
+            </a:r>
+            <a:r>
+              <a:rPr lang="en-US" sz="2200" dirty="0">
+                <a:solidFill>
+                  <a:schemeClr val="accent6">
+                    <a:lumMod val="60000"/>
+                    <a:lumOff val="40000"/>
+                  </a:schemeClr>
+                </a:solidFill>
+              </a:rPr>
+              <a:t>The agent drafts a risk score but notices its geographic analysis contradicts the client's typical device profile.</a:t>
+            </a:r>
+          </a:p>
+          <a:p>
+            <a:r>
+              <a:rPr lang="en-US" sz="2200" b="1" dirty="0">
+                <a:solidFill>
+                  <a:schemeClr val="accent6">
+                    <a:lumMod val="60000"/>
+                    <a:lumOff val="40000"/>
+                  </a:schemeClr>
+                </a:solidFill>
+              </a:rPr>
+              <a:t>Correction: </a:t>
+            </a:r>
+            <a:r>
+              <a:rPr lang="en-US" sz="2200" dirty="0">
+                <a:solidFill>
+                  <a:schemeClr val="accent6">
+                    <a:lumMod val="60000"/>
+                    <a:lumOff val="40000"/>
+                  </a:schemeClr>
+                </a:solidFill>
+              </a:rPr>
+              <a:t>It realizes the IP belongs to a commercial VPN provider. It reruns its evaluation script, updating the risk score from "medium" to "critical fraud risk."</a:t>
+            </a:r>
+          </a:p>
+          <a:p>
+            <a:r>
+              <a:rPr lang="en-US" sz="2200" b="1" dirty="0">
+                <a:solidFill>
+                  <a:schemeClr val="accent6">
+                    <a:lumMod val="60000"/>
+                    <a:lumOff val="40000"/>
+                  </a:schemeClr>
+                </a:solidFill>
+              </a:rPr>
+              <a:t>Final Action: </a:t>
+            </a:r>
+            <a:r>
+              <a:rPr lang="en-US" sz="2200" dirty="0">
+                <a:solidFill>
+                  <a:schemeClr val="accent6">
+                    <a:lumMod val="60000"/>
+                    <a:lumOff val="40000"/>
+                  </a:schemeClr>
+                </a:solidFill>
+              </a:rPr>
+              <a:t>It automatically freezes the account, blocks the transfer, and drafts an emergency alert email to the fraud operations team.</a:t>
+            </a:r>
+          </a:p>
+        </p:txBody>
+      </p:sp>
+      <p:pic>
+        <p:nvPicPr>
+          <p:cNvPr id="3" name="Picture 2">
+            <a:extLst>
+              <a:ext uri="{FF2B5EF4-FFF2-40B4-BE49-F238E27FC236}">
+                <a16:creationId xmlns:a16="http://schemas.microsoft.com/office/drawing/2014/main" id="{85A9C587-DADC-1856-7449-B19679926571}"/>
+              </a:ext>
+            </a:extLst>
+          </p:cNvPr>
+          <p:cNvPicPr>
+            <a:picLocks noChangeAspect="1"/>
+          </p:cNvPicPr>
+          <p:nvPr/>
+        </p:nvPicPr>
+        <p:blipFill>
+          <a:blip r:embed="rId2"/>
+          <a:stretch>
+            <a:fillRect/>
+          </a:stretch>
+        </p:blipFill>
+        <p:spPr>
+          <a:xfrm>
+            <a:off x="6547104" y="35472"/>
+            <a:ext cx="5644896" cy="6787055"/>
+          </a:xfrm>
+          <a:prstGeom prst="rect">
+            <a:avLst/>
+          </a:prstGeom>
+        </p:spPr>
+      </p:pic>
+    </p:spTree>
+    <p:extLst>
+      <p:ext uri="{BB962C8B-B14F-4D97-AF65-F5344CB8AC3E}">
+        <p14:creationId xmlns:p14="http://schemas.microsoft.com/office/powerpoint/2010/main" val="2437866056"/>
       </p:ext>
     </p:extLst>
   </p:cSld>

--- a/AgenticAI/1-Intro-To-AgenticAI/1_Definition_Of_Agentic_AI_and_application_in_FinTech.pptx
+++ b/AgenticAI/1-Intro-To-AgenticAI/1_Definition_Of_Agentic_AI_and_application_in_FinTech.pptx
@@ -240,7 +240,7 @@
           <a:p>
             <a:fld id="{7BAEECA8-D063-486F-AE31-5020270C1449}" type="datetimeFigureOut">
               <a:rPr lang="en-US" smtClean="0"/>
-              <a:t>5/28/2026</a:t>
+              <a:t>6/5/2026</a:t>
             </a:fld>
             <a:endParaRPr lang="en-US"/>
           </a:p>
@@ -417,7 +417,7 @@
           <a:p>
             <a:fld id="{CB233BD1-3BA8-448D-9D08-7846095EA517}" type="datetimeFigureOut">
               <a:rPr lang="en-US" smtClean="0"/>
-              <a:t>5/28/2026</a:t>
+              <a:t>6/5/2026</a:t>
             </a:fld>
             <a:endParaRPr lang="en-US"/>
           </a:p>
@@ -831,7 +831,7 @@
           <a:p>
             <a:fld id="{6383FAE1-13DE-4511-8C1B-C8AFB720664C}" type="datetimeFigureOut">
               <a:rPr lang="en-US" smtClean="0"/>
-              <a:t>5/28/2026</a:t>
+              <a:t>6/5/2026</a:t>
             </a:fld>
             <a:endParaRPr lang="en-US"/>
           </a:p>
@@ -1029,7 +1029,7 @@
           <a:p>
             <a:fld id="{6383FAE1-13DE-4511-8C1B-C8AFB720664C}" type="datetimeFigureOut">
               <a:rPr lang="en-US" smtClean="0"/>
-              <a:t>5/28/2026</a:t>
+              <a:t>6/5/2026</a:t>
             </a:fld>
             <a:endParaRPr lang="en-US"/>
           </a:p>
@@ -1237,7 +1237,7 @@
           <a:p>
             <a:fld id="{6383FAE1-13DE-4511-8C1B-C8AFB720664C}" type="datetimeFigureOut">
               <a:rPr lang="en-US" smtClean="0"/>
-              <a:t>5/28/2026</a:t>
+              <a:t>6/5/2026</a:t>
             </a:fld>
             <a:endParaRPr lang="en-US"/>
           </a:p>
@@ -1435,7 +1435,7 @@
           <a:p>
             <a:fld id="{6383FAE1-13DE-4511-8C1B-C8AFB720664C}" type="datetimeFigureOut">
               <a:rPr lang="en-US" smtClean="0"/>
-              <a:t>5/28/2026</a:t>
+              <a:t>6/5/2026</a:t>
             </a:fld>
             <a:endParaRPr lang="en-US"/>
           </a:p>
@@ -1710,7 +1710,7 @@
           <a:p>
             <a:fld id="{6383FAE1-13DE-4511-8C1B-C8AFB720664C}" type="datetimeFigureOut">
               <a:rPr lang="en-US" smtClean="0"/>
-              <a:t>5/28/2026</a:t>
+              <a:t>6/5/2026</a:t>
             </a:fld>
             <a:endParaRPr lang="en-US"/>
           </a:p>
@@ -1975,7 +1975,7 @@
           <a:p>
             <a:fld id="{6383FAE1-13DE-4511-8C1B-C8AFB720664C}" type="datetimeFigureOut">
               <a:rPr lang="en-US" smtClean="0"/>
-              <a:t>5/28/2026</a:t>
+              <a:t>6/5/2026</a:t>
             </a:fld>
             <a:endParaRPr lang="en-US"/>
           </a:p>
@@ -2387,7 +2387,7 @@
           <a:p>
             <a:fld id="{6383FAE1-13DE-4511-8C1B-C8AFB720664C}" type="datetimeFigureOut">
               <a:rPr lang="en-US" smtClean="0"/>
-              <a:t>5/28/2026</a:t>
+              <a:t>6/5/2026</a:t>
             </a:fld>
             <a:endParaRPr lang="en-US"/>
           </a:p>
@@ -2528,7 +2528,7 @@
           <a:p>
             <a:fld id="{6383FAE1-13DE-4511-8C1B-C8AFB720664C}" type="datetimeFigureOut">
               <a:rPr lang="en-US" smtClean="0"/>
-              <a:t>5/28/2026</a:t>
+              <a:t>6/5/2026</a:t>
             </a:fld>
             <a:endParaRPr lang="en-US"/>
           </a:p>
@@ -2641,7 +2641,7 @@
           <a:p>
             <a:fld id="{6383FAE1-13DE-4511-8C1B-C8AFB720664C}" type="datetimeFigureOut">
               <a:rPr lang="en-US" smtClean="0"/>
-              <a:t>5/28/2026</a:t>
+              <a:t>6/5/2026</a:t>
             </a:fld>
             <a:endParaRPr lang="en-US"/>
           </a:p>
@@ -2952,7 +2952,7 @@
           <a:p>
             <a:fld id="{6383FAE1-13DE-4511-8C1B-C8AFB720664C}" type="datetimeFigureOut">
               <a:rPr lang="en-US" smtClean="0"/>
-              <a:t>5/28/2026</a:t>
+              <a:t>6/5/2026</a:t>
             </a:fld>
             <a:endParaRPr lang="en-US"/>
           </a:p>
@@ -3243,7 +3243,7 @@
           <a:p>
             <a:fld id="{6383FAE1-13DE-4511-8C1B-C8AFB720664C}" type="datetimeFigureOut">
               <a:rPr lang="en-US" smtClean="0"/>
-              <a:t>5/28/2026</a:t>
+              <a:t>6/5/2026</a:t>
             </a:fld>
             <a:endParaRPr lang="en-US"/>
           </a:p>
@@ -3487,7 +3487,7 @@
           <a:p>
             <a:fld id="{6383FAE1-13DE-4511-8C1B-C8AFB720664C}" type="datetimeFigureOut">
               <a:rPr lang="en-US" smtClean="0"/>
-              <a:t>5/28/2026</a:t>
+              <a:t>6/5/2026</a:t>
             </a:fld>
             <a:endParaRPr lang="en-US"/>
           </a:p>
@@ -6613,7 +6613,7 @@
         <p:spPr>
           <a:xfrm>
             <a:off x="132588" y="1620732"/>
-            <a:ext cx="11246617" cy="1200329"/>
+            <a:ext cx="11246617" cy="1323439"/>
           </a:xfrm>
           <a:prstGeom prst="rect">
             <a:avLst/>
@@ -6627,20 +6627,20 @@
           <a:lstStyle/>
           <a:p>
             <a:r>
-              <a:rPr lang="en-US" sz="2400" dirty="0">
-                <a:solidFill>
-                  <a:schemeClr val="accent6">
-                    <a:lumMod val="60000"/>
-                    <a:lumOff val="40000"/>
-                  </a:schemeClr>
-                </a:solidFill>
-              </a:rPr>
-              <a:t>E.g.: A spam filter, a chess engine, a recommendation algorithm — these are trained or programmed for one narrow task. </a:t>
-            </a:r>
-          </a:p>
-          <a:p>
-            <a:r>
-              <a:rPr lang="en-US" sz="2400" dirty="0">
+              <a:rPr lang="en-US" sz="2000" dirty="0">
+                <a:solidFill>
+                  <a:schemeClr val="accent6">
+                    <a:lumMod val="60000"/>
+                    <a:lumOff val="40000"/>
+                  </a:schemeClr>
+                </a:solidFill>
+              </a:rPr>
+              <a:t>E.g.: A spam filter — these are trained or programmed for one narrow task. </a:t>
+            </a:r>
+          </a:p>
+          <a:p>
+            <a:r>
+              <a:rPr lang="en-US" sz="2000" dirty="0">
                 <a:solidFill>
                   <a:schemeClr val="accent6">
                     <a:lumMod val="60000"/>
@@ -6649,6 +6649,40 @@
                 </a:solidFill>
               </a:rPr>
               <a:t>They have no understanding of context beyond their domain.</a:t>
+            </a:r>
+          </a:p>
+          <a:p>
+            <a:pPr marL="342900" indent="-342900">
+              <a:buFont typeface="Arial" panose="020B0604020202020204" pitchFamily="34" charset="0"/>
+              <a:buChar char="•"/>
+            </a:pPr>
+            <a:r>
+              <a:rPr lang="en-US" sz="2000" dirty="0">
+                <a:solidFill>
+                  <a:schemeClr val="accent6">
+                    <a:lumMod val="60000"/>
+                    <a:lumOff val="40000"/>
+                  </a:schemeClr>
+                </a:solidFill>
+              </a:rPr>
+              <a:t>It does not remember first email from the second email or third email…</a:t>
+            </a:r>
+          </a:p>
+          <a:p>
+            <a:pPr marL="342900" indent="-342900">
+              <a:buFont typeface="Arial" panose="020B0604020202020204" pitchFamily="34" charset="0"/>
+              <a:buChar char="•"/>
+            </a:pPr>
+            <a:r>
+              <a:rPr lang="en-US" sz="2000" dirty="0">
+                <a:solidFill>
+                  <a:schemeClr val="accent6">
+                    <a:lumMod val="60000"/>
+                    <a:lumOff val="40000"/>
+                  </a:schemeClr>
+                </a:solidFill>
+              </a:rPr>
+              <a:t>Cannot generate any new content/email</a:t>
             </a:r>
           </a:p>
         </p:txBody>
@@ -8555,7 +8589,7 @@
               <a:t>Models like GPT-4 or Claude can </a:t>
             </a:r>
             <a:r>
-              <a:rPr lang="en-US" sz="2400" i="1" dirty="0">
+              <a:rPr lang="en-US" sz="2400" b="1" i="1" dirty="0">
                 <a:solidFill>
                   <a:schemeClr val="accent6">
                     <a:lumMod val="60000"/>
@@ -8578,8 +8612,9 @@
             </a:r>
           </a:p>
           <a:p>
-            <a:pPr>
-              <a:buNone/>
+            <a:pPr marL="342900" indent="-342900">
+              <a:buFont typeface="Arial" panose="020B0604020202020204" pitchFamily="34" charset="0"/>
+              <a:buChar char="•"/>
             </a:pPr>
             <a:r>
               <a:rPr lang="en-US" sz="2400" dirty="0">
@@ -8590,10 +8625,10 @@
                   </a:schemeClr>
                 </a:solidFill>
               </a:rPr>
-              <a:t>But they are fundamentally </a:t>
-            </a:r>
-            <a:r>
-              <a:rPr lang="en-US" sz="2400" i="1" dirty="0">
+              <a:t>They are fundamentally </a:t>
+            </a:r>
+            <a:r>
+              <a:rPr lang="en-US" sz="2400" b="1" i="1" dirty="0">
                 <a:solidFill>
                   <a:schemeClr val="accent6">
                     <a:lumMod val="60000"/>
@@ -8616,8 +8651,9 @@
             </a:r>
           </a:p>
           <a:p>
-            <a:pPr>
-              <a:buNone/>
+            <a:pPr marL="342900" indent="-342900">
+              <a:buFont typeface="Arial" panose="020B0604020202020204" pitchFamily="34" charset="0"/>
+              <a:buChar char="•"/>
             </a:pPr>
             <a:r>
               <a:rPr lang="en-US" sz="2400" dirty="0">
@@ -8628,7 +8664,29 @@
                   </a:schemeClr>
                 </a:solidFill>
               </a:rPr>
-              <a:t>They have no memory of yesterday, no ability to go check a website, no way to take an action in the world. </a:t>
+              <a:t>They have no way to take an action in the world – cannot </a:t>
+            </a:r>
+            <a:r>
+              <a:rPr lang="en-US" sz="2400" dirty="0" err="1">
+                <a:solidFill>
+                  <a:schemeClr val="accent6">
+                    <a:lumMod val="60000"/>
+                    <a:lumOff val="40000"/>
+                  </a:schemeClr>
+                </a:solidFill>
+              </a:rPr>
+              <a:t>goto</a:t>
+            </a:r>
+            <a:r>
+              <a:rPr lang="en-US" sz="2400" dirty="0">
+                <a:solidFill>
+                  <a:schemeClr val="accent6">
+                    <a:lumMod val="60000"/>
+                    <a:lumOff val="40000"/>
+                  </a:schemeClr>
+                </a:solidFill>
+              </a:rPr>
+              <a:t> website and buy items for you. </a:t>
             </a:r>
           </a:p>
         </p:txBody>
@@ -8777,7 +8835,29 @@
                   </a:schemeClr>
                 </a:solidFill>
               </a:rPr>
-              <a:t>. It receives a goal, breaks it into steps, uses tools (web search, code execution, APIs), checks its own output, and iterates — all without a human driving every step. </a:t>
+              <a:t>. It receives a goal, breaks it into steps, uses </a:t>
+            </a:r>
+            <a:r>
+              <a:rPr lang="en-US" sz="2400" b="1" i="1" dirty="0">
+                <a:solidFill>
+                  <a:schemeClr val="accent6">
+                    <a:lumMod val="60000"/>
+                    <a:lumOff val="40000"/>
+                  </a:schemeClr>
+                </a:solidFill>
+              </a:rPr>
+              <a:t>tools</a:t>
+            </a:r>
+            <a:r>
+              <a:rPr lang="en-US" sz="2400" dirty="0">
+                <a:solidFill>
+                  <a:schemeClr val="accent6">
+                    <a:lumMod val="60000"/>
+                    <a:lumOff val="40000"/>
+                  </a:schemeClr>
+                </a:solidFill>
+              </a:rPr>
+              <a:t> (web search, code execution, APIs), checks its own output, and iterates — all without a human driving every step. </a:t>
             </a:r>
           </a:p>
           <a:p>
@@ -9160,7 +9240,29 @@
                   </a:schemeClr>
                 </a:solidFill>
               </a:rPr>
-              <a:t> — Given a high-level objective, the agent breaks it into subtasks automatically.</a:t>
+              <a:t> — Given a high-level objective, the agent breaks it into </a:t>
+            </a:r>
+            <a:r>
+              <a:rPr lang="en-US" sz="2200" b="1" i="1" dirty="0">
+                <a:solidFill>
+                  <a:schemeClr val="accent6">
+                    <a:lumMod val="60000"/>
+                    <a:lumOff val="40000"/>
+                  </a:schemeClr>
+                </a:solidFill>
+              </a:rPr>
+              <a:t>subtasks</a:t>
+            </a:r>
+            <a:r>
+              <a:rPr lang="en-US" sz="2200" dirty="0">
+                <a:solidFill>
+                  <a:schemeClr val="accent6">
+                    <a:lumMod val="60000"/>
+                    <a:lumOff val="40000"/>
+                  </a:schemeClr>
+                </a:solidFill>
+              </a:rPr>
+              <a:t> automatically.</a:t>
             </a:r>
           </a:p>
           <a:p>
@@ -9265,7 +9367,29 @@
                   </a:schemeClr>
                 </a:solidFill>
               </a:rPr>
-              <a:t> Check the client’s historical transaction patterns.</a:t>
+              <a:t> </a:t>
+            </a:r>
+            <a:r>
+              <a:rPr lang="en-US" sz="2400" b="1" dirty="0">
+                <a:solidFill>
+                  <a:schemeClr val="accent6">
+                    <a:lumMod val="60000"/>
+                    <a:lumOff val="40000"/>
+                  </a:schemeClr>
+                </a:solidFill>
+              </a:rPr>
+              <a:t>Retrieve and check</a:t>
+            </a:r>
+            <a:r>
+              <a:rPr lang="en-US" sz="2400" dirty="0">
+                <a:solidFill>
+                  <a:schemeClr val="accent6">
+                    <a:lumMod val="60000"/>
+                    <a:lumOff val="40000"/>
+                  </a:schemeClr>
+                </a:solidFill>
+              </a:rPr>
+              <a:t> the client’s historical transaction patterns.</a:t>
             </a:r>
           </a:p>
           <a:p>
@@ -10007,7 +10131,29 @@
                   </a:schemeClr>
                 </a:solidFill>
               </a:rPr>
-              <a:t> — Agents can evaluate their own outputs, notice errors, and retry. </a:t>
+              <a:t> — Agents can </a:t>
+            </a:r>
+            <a:r>
+              <a:rPr lang="en-US" sz="2200" b="1" i="1" dirty="0">
+                <a:solidFill>
+                  <a:schemeClr val="accent6">
+                    <a:lumMod val="60000"/>
+                    <a:lumOff val="40000"/>
+                  </a:schemeClr>
+                </a:solidFill>
+              </a:rPr>
+              <a:t>evaluate</a:t>
+            </a:r>
+            <a:r>
+              <a:rPr lang="en-US" sz="2200" dirty="0">
+                <a:solidFill>
+                  <a:schemeClr val="accent6">
+                    <a:lumMod val="60000"/>
+                    <a:lumOff val="40000"/>
+                  </a:schemeClr>
+                </a:solidFill>
+              </a:rPr>
+              <a:t> their own outputs, notice errors, and retry. </a:t>
             </a:r>
           </a:p>
           <a:p>
